--- a/slide/pptx/P11-FSM-dan-Debugging.pptx
+++ b/slide/pptx/P11-FSM-dan-Debugging.pptx
@@ -131,14 +131,14 @@
   <p:extLst>
     <p:ext uri="{521415D9-36F7-43E2-AB2F-B90AF26B5E84}">
       <p14:sectionLst xmlns:p14="http://schemas.microsoft.com/office/powerpoint/2010/main">
-        <p14:section name="Pembuka" id="{a9af2bb6-07cc-c069-3b3f-3eca0179230a}">
+        <p14:section name="Pembuka" id="{a9091c99-d110-04a8-3b76-1d062d620576}">
           <p14:sldIdLst>
             <p14:sldId id="256"/>
             <p14:sldId id="257"/>
             <p14:sldId id="258"/>
           </p14:sldIdLst>
         </p14:section>
-        <p14:section name="FSM" id="{94877c78-0860-da3b-6b9f-a096458434aa}">
+        <p14:section name="FSM" id="{b5907f8e-5667-b2fa-6d13-49bce50fcda0}">
           <p14:sldIdLst>
             <p14:sldId id="259"/>
             <p14:sldId id="260"/>
@@ -150,7 +150,7 @@
             <p14:sldId id="266"/>
           </p14:sldIdLst>
         </p14:section>
-        <p14:section name="Rapi" id="{dbba4458-8741-9b49-297a-00c696a43bc1}">
+        <p14:section name="Rapi" id="{74a06dfd-e2c5-ac9b-00bd-7fcb5234ea7b}">
           <p14:sldIdLst>
             <p14:sldId id="267"/>
             <p14:sldId id="268"/>
@@ -160,7 +160,7 @@
             <p14:sldId id="272"/>
           </p14:sldIdLst>
         </p14:section>
-        <p14:section name="Crash" id="{ec0c2837-d052-3f3c-b3ec-09f1f522e38a}">
+        <p14:section name="Crash" id="{b2515255-96a3-f71e-a955-b0e42ea6e086}">
           <p14:sldIdLst>
             <p14:sldId id="273"/>
             <p14:sldId id="274"/>
@@ -170,7 +170,7 @@
             <p14:sldId id="278"/>
           </p14:sldIdLst>
         </p14:section>
-        <p14:section name="Penutup" id="{7ae3ffa1-0c91-b69b-f2c5-88a154e1bb53}">
+        <p14:section name="Penutup" id="{cc807a8e-5424-4fa2-8068-8b630d77d80b}">
           <p14:sldIdLst>
             <p14:sldId id="279"/>
             <p14:sldId id="280"/>
@@ -14927,7 +14927,7 @@
                   <a:schemeClr val="bg1"/>
                 </a:solidFill>
               </a:rPr>
-              <a:t>Pola C++: </a:t>
+              <a:t>FSM di C++: </a:t>
             </a:r>
             <a:r>
               <a:rPr lang="en-US" sz="2000" dirty="0">
@@ -14946,7 +14946,7 @@
                   <a:schemeClr val="bg1"/>
                 </a:solidFill>
               </a:rPr>
-              <a:t> + </a:t>
+              <a:t> untuk daftar keadaan, </a:t>
             </a:r>
             <a:r>
               <a:rPr lang="en-US" sz="2000" dirty="0">
@@ -14965,7 +14965,7 @@
                   <a:schemeClr val="bg1"/>
                 </a:solidFill>
               </a:rPr>
-              <a:t> + </a:t>
+              <a:t> untuk aturannya, </a:t>
             </a:r>
             <a:r>
               <a:rPr lang="en-US" sz="2000" dirty="0">
@@ -14976,7 +14976,7 @@
                 <a:ea typeface="Consolas" pitchFamily="34" charset="-122"/>
                 <a:cs typeface="Consolas" pitchFamily="34" charset="-120"/>
               </a:rPr>
-              <a:t>masukKeadaan()</a:t>
+              <a:t>millis()</a:t>
             </a:r>
             <a:r>
               <a:rPr lang="en-US" sz="2000" dirty="0">
@@ -14984,18 +14984,7 @@
                   <a:schemeClr val="bg1"/>
                 </a:solidFill>
               </a:rPr>
-              <a:t> + </a:t>
-            </a:r>
-            <a:r>
-              <a:rPr lang="en-US" sz="2000" dirty="0">
-                <a:solidFill>
-                  <a:srgbClr val="F2C98A"/>
-                </a:solidFill>
-                <a:latin typeface="Consolas" pitchFamily="34" charset="0"/>
-                <a:ea typeface="Consolas" pitchFamily="34" charset="-122"/>
-                <a:cs typeface="Consolas" pitchFamily="34" charset="-120"/>
-              </a:rPr>
-              <a:t>millis()</a:t>
+              <a:t> untuk waktu</a:t>
             </a:r>
             <a:endParaRPr lang="en-US" sz="2000" dirty="0"/>
           </a:p>
@@ -15192,12 +15181,20 @@
               <a:buNone/>
             </a:pPr>
             <a:r>
+              <a:rPr lang="en-US" sz="2000" i="1" dirty="0">
+                <a:solidFill>
+                  <a:schemeClr val="bg1"/>
+                </a:solidFill>
+              </a:rPr>
+              <a:t>Debugging</a:t>
+            </a:r>
+            <a:r>
               <a:rPr lang="en-US" sz="2000" dirty="0">
                 <a:solidFill>
                   <a:schemeClr val="bg1"/>
                 </a:solidFill>
               </a:rPr>
-              <a:t>Debugging: log terstruktur, </a:t>
+              <a:t>: pesan log bertingkat (</a:t>
             </a:r>
             <a:r>
               <a:rPr lang="en-US" sz="2000" dirty="0">
@@ -15208,7 +15205,7 @@
                 <a:ea typeface="Consolas" pitchFamily="34" charset="-122"/>
                 <a:cs typeface="Consolas" pitchFamily="34" charset="-120"/>
               </a:rPr>
-              <a:t>log_x</a:t>
+              <a:t>log_e</a:t>
             </a:r>
             <a:r>
               <a:rPr lang="en-US" sz="2000" dirty="0">
@@ -15216,7 +15213,7 @@
                   <a:schemeClr val="bg1"/>
                 </a:solidFill>
               </a:rPr>
-              <a:t> + </a:t>
+              <a:t> … </a:t>
             </a:r>
             <a:r>
               <a:rPr lang="en-US" sz="2000" dirty="0">
@@ -15227,7 +15224,7 @@
                 <a:ea typeface="Consolas" pitchFamily="34" charset="-122"/>
                 <a:cs typeface="Consolas" pitchFamily="34" charset="-120"/>
               </a:rPr>
-              <a:t>CORE_DEBUG_LEVEL</a:t>
+              <a:t>log_d</a:t>
             </a:r>
             <a:r>
               <a:rPr lang="en-US" sz="2000" dirty="0">
@@ -15235,7 +15232,7 @@
                   <a:schemeClr val="bg1"/>
                 </a:solidFill>
               </a:rPr>
-              <a:t>, </a:t>
+              <a:t>), </a:t>
             </a:r>
             <a:r>
               <a:rPr lang="en-US" sz="2000" dirty="0">
@@ -15254,7 +15251,7 @@
                   <a:schemeClr val="bg1"/>
                 </a:solidFill>
               </a:rPr>
-              <a:t>, membagi dua</a:t>
+              <a:t>, dan teknik membagi dua</a:t>
             </a:r>
             <a:endParaRPr lang="en-US" sz="2000" dirty="0"/>
           </a:p>
